--- a/Documentação/Apresentação PI 2.0.pptx
+++ b/Documentação/Apresentação PI 2.0.pptx
@@ -17,10 +17,9 @@
     <p:sldId id="272" r:id="rId11"/>
     <p:sldId id="273" r:id="rId12"/>
     <p:sldId id="274" r:id="rId13"/>
-    <p:sldId id="275" r:id="rId14"/>
-    <p:sldId id="280" r:id="rId15"/>
-    <p:sldId id="282" r:id="rId16"/>
-    <p:sldId id="283" r:id="rId17"/>
+    <p:sldId id="282" r:id="rId14"/>
+    <p:sldId id="283" r:id="rId15"/>
+    <p:sldId id="280" r:id="rId16"/>
   </p:sldIdLst>
   <p:sldSz cx="12192000" cy="6858000"/>
   <p:notesSz cx="6858000" cy="9144000"/>
@@ -256,7 +255,7 @@
           <a:p>
             <a:fld id="{5F09480D-47D9-454F-A670-F71D8499E492}" type="datetimeFigureOut">
               <a:rPr lang="pt-BR" smtClean="0"/>
-              <a:t>08/05/2026</a:t>
+              <a:t>13/05/2026</a:t>
             </a:fld>
             <a:endParaRPr lang="pt-BR"/>
           </a:p>
@@ -424,7 +423,7 @@
           <a:p>
             <a:fld id="{5F09480D-47D9-454F-A670-F71D8499E492}" type="datetimeFigureOut">
               <a:rPr lang="pt-BR" smtClean="0"/>
-              <a:t>08/05/2026</a:t>
+              <a:t>13/05/2026</a:t>
             </a:fld>
             <a:endParaRPr lang="pt-BR"/>
           </a:p>
@@ -602,7 +601,7 @@
           <a:p>
             <a:fld id="{5F09480D-47D9-454F-A670-F71D8499E492}" type="datetimeFigureOut">
               <a:rPr lang="pt-BR" smtClean="0"/>
-              <a:t>08/05/2026</a:t>
+              <a:t>13/05/2026</a:t>
             </a:fld>
             <a:endParaRPr lang="pt-BR"/>
           </a:p>
@@ -770,7 +769,7 @@
           <a:p>
             <a:fld id="{5F09480D-47D9-454F-A670-F71D8499E492}" type="datetimeFigureOut">
               <a:rPr lang="pt-BR" smtClean="0"/>
-              <a:t>08/05/2026</a:t>
+              <a:t>13/05/2026</a:t>
             </a:fld>
             <a:endParaRPr lang="pt-BR"/>
           </a:p>
@@ -1015,7 +1014,7 @@
           <a:p>
             <a:fld id="{5F09480D-47D9-454F-A670-F71D8499E492}" type="datetimeFigureOut">
               <a:rPr lang="pt-BR" smtClean="0"/>
-              <a:t>08/05/2026</a:t>
+              <a:t>13/05/2026</a:t>
             </a:fld>
             <a:endParaRPr lang="pt-BR"/>
           </a:p>
@@ -1244,7 +1243,7 @@
           <a:p>
             <a:fld id="{5F09480D-47D9-454F-A670-F71D8499E492}" type="datetimeFigureOut">
               <a:rPr lang="pt-BR" smtClean="0"/>
-              <a:t>08/05/2026</a:t>
+              <a:t>13/05/2026</a:t>
             </a:fld>
             <a:endParaRPr lang="pt-BR"/>
           </a:p>
@@ -1608,7 +1607,7 @@
           <a:p>
             <a:fld id="{5F09480D-47D9-454F-A670-F71D8499E492}" type="datetimeFigureOut">
               <a:rPr lang="pt-BR" smtClean="0"/>
-              <a:t>08/05/2026</a:t>
+              <a:t>13/05/2026</a:t>
             </a:fld>
             <a:endParaRPr lang="pt-BR"/>
           </a:p>
@@ -1725,7 +1724,7 @@
           <a:p>
             <a:fld id="{5F09480D-47D9-454F-A670-F71D8499E492}" type="datetimeFigureOut">
               <a:rPr lang="pt-BR" smtClean="0"/>
-              <a:t>08/05/2026</a:t>
+              <a:t>13/05/2026</a:t>
             </a:fld>
             <a:endParaRPr lang="pt-BR"/>
           </a:p>
@@ -1820,7 +1819,7 @@
           <a:p>
             <a:fld id="{5F09480D-47D9-454F-A670-F71D8499E492}" type="datetimeFigureOut">
               <a:rPr lang="pt-BR" smtClean="0"/>
-              <a:t>08/05/2026</a:t>
+              <a:t>13/05/2026</a:t>
             </a:fld>
             <a:endParaRPr lang="pt-BR"/>
           </a:p>
@@ -2095,7 +2094,7 @@
           <a:p>
             <a:fld id="{5F09480D-47D9-454F-A670-F71D8499E492}" type="datetimeFigureOut">
               <a:rPr lang="pt-BR" smtClean="0"/>
-              <a:t>08/05/2026</a:t>
+              <a:t>13/05/2026</a:t>
             </a:fld>
             <a:endParaRPr lang="pt-BR"/>
           </a:p>
@@ -2347,7 +2346,7 @@
           <a:p>
             <a:fld id="{5F09480D-47D9-454F-A670-F71D8499E492}" type="datetimeFigureOut">
               <a:rPr lang="pt-BR" smtClean="0"/>
-              <a:t>08/05/2026</a:t>
+              <a:t>13/05/2026</a:t>
             </a:fld>
             <a:endParaRPr lang="pt-BR"/>
           </a:p>
@@ -2558,7 +2557,7 @@
           <a:p>
             <a:fld id="{5F09480D-47D9-454F-A670-F71D8499E492}" type="datetimeFigureOut">
               <a:rPr lang="pt-BR" smtClean="0"/>
-              <a:t>08/05/2026</a:t>
+              <a:t>13/05/2026</a:t>
             </a:fld>
             <a:endParaRPr lang="pt-BR"/>
           </a:p>
@@ -3371,7 +3370,7 @@
           <a:p>
             <a:r>
               <a:rPr lang="pt-BR" dirty="0"/>
-              <a:t>Telas</a:t>
+              <a:t>Referências </a:t>
             </a:r>
           </a:p>
         </p:txBody>
@@ -3398,22 +3397,39 @@
           </a:bodyPr>
           <a:lstStyle/>
           <a:p>
-            <a:r>
-              <a:rPr lang="pt-BR" dirty="0"/>
-              <a:t>As interfaces foram desenvolvidas para serem simples.</a:t>
-            </a:r>
-          </a:p>
-          <a:p>
-            <a:r>
-              <a:rPr lang="pt-BR" dirty="0"/>
-              <a:t>Contém um Index (pagina principal), uma tela de login e alteração de dados, uma tela de listagem de noticias, uma tela de publicação de noticias, uma tela de edição de noticias, três paginas estáticas e uma pagina de controle para admin.</a:t>
-            </a:r>
-          </a:p>
-          <a:p>
-            <a:r>
-              <a:rPr lang="pt-BR" dirty="0"/>
-              <a:t>Existem regras de acesso a certas paginas, como a pagina de publicação só podendo ser acessada por um usuário autenticado e atualmente logado e a pagina de controle só podendo ser acessada por um Admin. </a:t>
-            </a:r>
+            <a:pPr marL="342900" indent="-342900">
+              <a:buFont typeface="Arial" panose="020B0604020202020204" pitchFamily="34" charset="0"/>
+              <a:buChar char="•"/>
+            </a:pPr>
+            <a:r>
+              <a:rPr lang="pt-BR" dirty="0"/>
+              <a:t>Material do Curso, disponível em &lt;</a:t>
+            </a:r>
+            <a:r>
+              <a:rPr lang="pt-BR" dirty="0">
+                <a:hlinkClick r:id="rId2"/>
+              </a:rPr>
+              <a:t>https://senac.blackboard.com/</a:t>
+            </a:r>
+            <a:r>
+              <a:rPr lang="pt-BR" dirty="0"/>
+              <a:t>&gt;</a:t>
+            </a:r>
+          </a:p>
+          <a:p>
+            <a:pPr marL="342900" indent="-342900">
+              <a:buFont typeface="Arial" panose="020B0604020202020204" pitchFamily="34" charset="0"/>
+              <a:buChar char="•"/>
+            </a:pPr>
+            <a:r>
+              <a:rPr lang="pt-BR" dirty="0"/>
+              <a:t>Professor Claudio Roberto, </a:t>
+            </a:r>
+            <a:r>
+              <a:rPr lang="it-IT" dirty="0"/>
+              <a:t>Daniel Ventura, Luis Gustavo Razzera e Anderson Choren.</a:t>
+            </a:r>
+            <a:endParaRPr lang="pt-BR" dirty="0"/>
           </a:p>
         </p:txBody>
       </p:sp>
@@ -3426,7 +3442,7 @@
           <p:nvPr/>
         </p:nvPicPr>
         <p:blipFill>
-          <a:blip r:embed="rId2">
+          <a:blip r:embed="rId3">
             <a:extLst>
               <a:ext uri="{28A0092B-C50C-407E-A947-70E740481C1C}">
                 <a14:useLocalDpi xmlns:a14="http://schemas.microsoft.com/office/drawing/2010/main" val="0"/>
@@ -3450,7 +3466,7 @@
     </p:spTree>
     <p:extLst>
       <p:ext uri="{BB962C8B-B14F-4D97-AF65-F5344CB8AC3E}">
-        <p14:creationId xmlns:p14="http://schemas.microsoft.com/office/powerpoint/2010/main" val="570746068"/>
+        <p14:creationId xmlns:p14="http://schemas.microsoft.com/office/powerpoint/2010/main" val="1583367068"/>
       </p:ext>
     </p:extLst>
   </p:cSld>
@@ -3501,7 +3517,7 @@
           <a:p>
             <a:r>
               <a:rPr lang="pt-BR" dirty="0"/>
-              <a:t>Conclusão</a:t>
+              <a:t>Tecnologias Usadas </a:t>
             </a:r>
           </a:p>
         </p:txBody>
@@ -3518,8 +3534,8 @@
         </p:nvSpPr>
         <p:spPr>
           <a:xfrm>
-            <a:off x="1524000" y="3602038"/>
-            <a:ext cx="9144000" cy="3004502"/>
+            <a:off x="1524000" y="2728084"/>
+            <a:ext cx="9144000" cy="4129916"/>
           </a:xfrm>
         </p:spPr>
         <p:txBody>
@@ -3528,10 +3544,218 @@
           </a:bodyPr>
           <a:lstStyle/>
           <a:p>
-            <a:r>
-              <a:rPr lang="pt-BR" dirty="0"/>
-              <a:t>O desenvolvimento do projeto tem uma criação de uma aplicação web funcional, alinhada aos objetivos propostos, voltada a publicação e organização de conteúdos sobre o esporte a motor. O sistema atende aos requisitos definidos, e oferece todos os recursos propostos, trazendo uma experiência boa ao usuário. </a:t>
-            </a:r>
+            <a:pPr marL="342900" indent="-342900">
+              <a:buFont typeface="Arial" panose="020B0604020202020204" pitchFamily="34" charset="0"/>
+              <a:buChar char="•"/>
+            </a:pPr>
+            <a:r>
+              <a:rPr lang="pt-BR" dirty="0"/>
+              <a:t>Aplicativo </a:t>
+            </a:r>
+            <a:r>
+              <a:rPr lang="pt-BR" dirty="0" err="1"/>
+              <a:t>BRModelo</a:t>
+            </a:r>
+            <a:r>
+              <a:rPr lang="pt-BR" dirty="0"/>
+              <a:t>, disponível em &lt;</a:t>
+            </a:r>
+            <a:r>
+              <a:rPr lang="pt-BR" u="sng" dirty="0">
+                <a:hlinkClick r:id="rId2"/>
+              </a:rPr>
+              <a:t>https://sourceforge.net/projects/brmodelo/</a:t>
+            </a:r>
+            <a:r>
+              <a:rPr lang="pt-BR" u="sng" dirty="0"/>
+              <a:t>&gt;</a:t>
+            </a:r>
+          </a:p>
+          <a:p>
+            <a:pPr marL="342900" indent="-342900">
+              <a:buFont typeface="Arial" panose="020B0604020202020204" pitchFamily="34" charset="0"/>
+              <a:buChar char="•"/>
+            </a:pPr>
+            <a:r>
+              <a:rPr lang="pt-BR" dirty="0"/>
+              <a:t>Aplicativo </a:t>
+            </a:r>
+            <a:r>
+              <a:rPr lang="pt-BR" dirty="0" err="1"/>
+              <a:t>Atash</a:t>
+            </a:r>
+            <a:r>
+              <a:rPr lang="pt-BR" dirty="0"/>
+              <a:t>, disponível em </a:t>
+            </a:r>
+            <a:r>
+              <a:rPr lang="pt-BR" u="sng" dirty="0">
+                <a:hlinkClick r:id="rId3"/>
+              </a:rPr>
+              <a:t>https://astah.net/</a:t>
+            </a:r>
+            <a:endParaRPr lang="pt-BR" u="sng" dirty="0"/>
+          </a:p>
+          <a:p>
+            <a:pPr marL="342900" indent="-342900">
+              <a:buFont typeface="Arial" panose="020B0604020202020204" pitchFamily="34" charset="0"/>
+              <a:buChar char="•"/>
+            </a:pPr>
+            <a:r>
+              <a:rPr lang="pt-BR" dirty="0"/>
+              <a:t>Aplicativo IDE </a:t>
+            </a:r>
+            <a:r>
+              <a:rPr lang="pt-BR" dirty="0" err="1"/>
+              <a:t>VSCode</a:t>
+            </a:r>
+            <a:r>
+              <a:rPr lang="pt-BR" dirty="0"/>
+              <a:t>, disponível em &lt;</a:t>
+            </a:r>
+            <a:r>
+              <a:rPr lang="pt-BR" u="sng" dirty="0">
+                <a:hlinkClick r:id="rId4"/>
+              </a:rPr>
+              <a:t>https://code.visualstudio.com/download</a:t>
+            </a:r>
+            <a:r>
+              <a:rPr lang="pt-BR" u="sng" dirty="0"/>
+              <a:t>&gt; </a:t>
+            </a:r>
+          </a:p>
+          <a:p>
+            <a:pPr marL="342900" indent="-342900">
+              <a:buFont typeface="Arial" panose="020B0604020202020204" pitchFamily="34" charset="0"/>
+              <a:buChar char="•"/>
+            </a:pPr>
+            <a:r>
+              <a:rPr lang="pt-BR" dirty="0"/>
+              <a:t>Aplicativo Adobe Illustrator, disponível em: &lt;</a:t>
+            </a:r>
+            <a:r>
+              <a:rPr lang="pt-BR" dirty="0">
+                <a:hlinkClick r:id="rId5"/>
+              </a:rPr>
+              <a:t>https://www.adobe.com/</a:t>
+            </a:r>
+            <a:r>
+              <a:rPr lang="pt-BR" dirty="0" err="1">
+                <a:hlinkClick r:id="rId5"/>
+              </a:rPr>
+              <a:t>br</a:t>
+            </a:r>
+            <a:r>
+              <a:rPr lang="pt-BR" dirty="0">
+                <a:hlinkClick r:id="rId5"/>
+              </a:rPr>
+              <a:t>/</a:t>
+            </a:r>
+            <a:r>
+              <a:rPr lang="pt-BR" dirty="0" err="1">
+                <a:hlinkClick r:id="rId5"/>
+              </a:rPr>
+              <a:t>creativecloud</a:t>
+            </a:r>
+            <a:r>
+              <a:rPr lang="pt-BR" dirty="0">
+                <a:hlinkClick r:id="rId5"/>
+              </a:rPr>
+              <a:t>/plans.html</a:t>
+            </a:r>
+            <a:r>
+              <a:rPr lang="pt-BR" dirty="0"/>
+              <a:t>&gt;  </a:t>
+            </a:r>
+          </a:p>
+          <a:p>
+            <a:pPr marL="342900" indent="-342900">
+              <a:lnSpc>
+                <a:spcPct val="100000"/>
+              </a:lnSpc>
+              <a:buFont typeface="Arial" panose="020B0604020202020204" pitchFamily="34" charset="0"/>
+              <a:buChar char="•"/>
+            </a:pPr>
+            <a:r>
+              <a:rPr lang="pt-BR" dirty="0"/>
+              <a:t>Aplicativo Adobe Photoshop, disponível em: &lt;</a:t>
+            </a:r>
+            <a:r>
+              <a:rPr lang="pt-BR" dirty="0">
+                <a:hlinkClick r:id="rId5"/>
+              </a:rPr>
+              <a:t>https://www.adobe.com/</a:t>
+            </a:r>
+            <a:r>
+              <a:rPr lang="pt-BR" dirty="0" err="1">
+                <a:hlinkClick r:id="rId5"/>
+              </a:rPr>
+              <a:t>br</a:t>
+            </a:r>
+            <a:r>
+              <a:rPr lang="pt-BR" dirty="0">
+                <a:hlinkClick r:id="rId5"/>
+              </a:rPr>
+              <a:t>/</a:t>
+            </a:r>
+            <a:r>
+              <a:rPr lang="pt-BR" dirty="0" err="1">
+                <a:hlinkClick r:id="rId5"/>
+              </a:rPr>
+              <a:t>creativecloud</a:t>
+            </a:r>
+            <a:r>
+              <a:rPr lang="pt-BR" dirty="0">
+                <a:hlinkClick r:id="rId5"/>
+              </a:rPr>
+              <a:t>/plans.html</a:t>
+            </a:r>
+            <a:r>
+              <a:rPr lang="pt-BR" dirty="0"/>
+              <a:t>&gt;</a:t>
+            </a:r>
+          </a:p>
+          <a:p>
+            <a:pPr marL="342900" indent="-342900">
+              <a:buFont typeface="Arial" panose="020B0604020202020204" pitchFamily="34" charset="0"/>
+              <a:buChar char="•"/>
+            </a:pPr>
+            <a:endParaRPr lang="pt-BR" dirty="0"/>
+          </a:p>
+          <a:p>
+            <a:pPr marL="342900" indent="-342900">
+              <a:buFont typeface="Arial" panose="020B0604020202020204" pitchFamily="34" charset="0"/>
+              <a:buChar char="•"/>
+            </a:pPr>
+            <a:endParaRPr lang="pt-BR" dirty="0"/>
+          </a:p>
+          <a:p>
+            <a:pPr marL="342900" indent="-342900">
+              <a:buFont typeface="Arial" panose="020B0604020202020204" pitchFamily="34" charset="0"/>
+              <a:buChar char="•"/>
+            </a:pPr>
+            <a:endParaRPr lang="pt-BR" u="sng" dirty="0"/>
+          </a:p>
+          <a:p>
+            <a:pPr marL="342900" indent="-342900">
+              <a:buFont typeface="Arial" panose="020B0604020202020204" pitchFamily="34" charset="0"/>
+              <a:buChar char="•"/>
+            </a:pPr>
+            <a:endParaRPr lang="pt-BR" u="sng" dirty="0"/>
+          </a:p>
+          <a:p>
+            <a:pPr marL="342900" indent="-342900">
+              <a:buFont typeface="Arial" panose="020B0604020202020204" pitchFamily="34" charset="0"/>
+              <a:buChar char="•"/>
+            </a:pPr>
+            <a:endParaRPr lang="pt-BR" u="sng" dirty="0"/>
+          </a:p>
+          <a:p>
+            <a:pPr marL="342900" indent="-342900">
+              <a:buFont typeface="Arial" panose="020B0604020202020204" pitchFamily="34" charset="0"/>
+              <a:buChar char="•"/>
+            </a:pPr>
+            <a:endParaRPr lang="pt-BR" dirty="0"/>
           </a:p>
         </p:txBody>
       </p:sp>
@@ -3544,7 +3768,7 @@
           <p:nvPr/>
         </p:nvPicPr>
         <p:blipFill>
-          <a:blip r:embed="rId2">
+          <a:blip r:embed="rId6">
             <a:extLst>
               <a:ext uri="{28A0092B-C50C-407E-A947-70E740481C1C}">
                 <a14:useLocalDpi xmlns:a14="http://schemas.microsoft.com/office/drawing/2010/main" val="0"/>
@@ -3568,7 +3792,7 @@
     </p:spTree>
     <p:extLst>
       <p:ext uri="{BB962C8B-B14F-4D97-AF65-F5344CB8AC3E}">
-        <p14:creationId xmlns:p14="http://schemas.microsoft.com/office/powerpoint/2010/main" val="297548743"/>
+        <p14:creationId xmlns:p14="http://schemas.microsoft.com/office/powerpoint/2010/main" val="3847982408"/>
       </p:ext>
     </p:extLst>
   </p:cSld>
@@ -3619,7 +3843,7 @@
           <a:p>
             <a:r>
               <a:rPr lang="pt-BR" dirty="0"/>
-              <a:t>Referências </a:t>
+              <a:t>Conclusão</a:t>
             </a:r>
           </a:p>
         </p:txBody>
@@ -3646,37 +3870,13 @@
           </a:bodyPr>
           <a:lstStyle/>
           <a:p>
-            <a:pPr marL="342900" indent="-342900">
-              <a:buFont typeface="Arial" panose="020B0604020202020204" pitchFamily="34" charset="0"/>
-              <a:buChar char="•"/>
-            </a:pPr>
-            <a:r>
-              <a:rPr lang="pt-BR" dirty="0"/>
-              <a:t>Material do Curso, disponível em &lt;</a:t>
-            </a:r>
-            <a:r>
-              <a:rPr lang="pt-BR" dirty="0">
-                <a:hlinkClick r:id="rId2"/>
-              </a:rPr>
-              <a:t>https://senac.blackboard.com/</a:t>
-            </a:r>
-            <a:r>
-              <a:rPr lang="pt-BR" dirty="0"/>
-              <a:t>&gt;</a:t>
-            </a:r>
-          </a:p>
-          <a:p>
-            <a:pPr marL="342900" indent="-342900">
-              <a:buFont typeface="Arial" panose="020B0604020202020204" pitchFamily="34" charset="0"/>
-              <a:buChar char="•"/>
-            </a:pPr>
-            <a:r>
-              <a:rPr lang="pt-BR" dirty="0"/>
-              <a:t>Professor Claudio Roberto, </a:t>
-            </a:r>
-            <a:r>
-              <a:rPr lang="it-IT" dirty="0"/>
-              <a:t>Daniel Ventura, Luis Gustavo Razzera e Anderson Choren.</a:t>
+            <a:r>
+              <a:rPr lang="pt-BR" dirty="0"/>
+              <a:t>O desenvolvimento do projeto tem uma criação de uma aplicação web funcional, alinhada aos objetivos propostos, voltada a publicação e organização de conteúdos sobre o esporte a motor. O sistema atende aos requisitos definidos, e oferece todos os </a:t>
+            </a:r>
+            <a:r>
+              <a:rPr lang="pt-BR"/>
+              <a:t>recursos propostos.</a:t>
             </a:r>
             <a:endParaRPr lang="pt-BR" dirty="0"/>
           </a:p>
@@ -3691,7 +3891,7 @@
           <p:nvPr/>
         </p:nvPicPr>
         <p:blipFill>
-          <a:blip r:embed="rId3">
+          <a:blip r:embed="rId2">
             <a:extLst>
               <a:ext uri="{28A0092B-C50C-407E-A947-70E740481C1C}">
                 <a14:useLocalDpi xmlns:a14="http://schemas.microsoft.com/office/drawing/2010/main" val="0"/>
@@ -3715,333 +3915,7 @@
     </p:spTree>
     <p:extLst>
       <p:ext uri="{BB962C8B-B14F-4D97-AF65-F5344CB8AC3E}">
-        <p14:creationId xmlns:p14="http://schemas.microsoft.com/office/powerpoint/2010/main" val="1583367068"/>
-      </p:ext>
-    </p:extLst>
-  </p:cSld>
-  <p:clrMapOvr>
-    <a:masterClrMapping/>
-  </p:clrMapOvr>
-</p:sld>
-</file>
-
-<file path=ppt/slides/slide16.xml><?xml version="1.0" encoding="utf-8"?>
-<p:sld xmlns:a="http://schemas.openxmlformats.org/drawingml/2006/main" xmlns:r="http://schemas.openxmlformats.org/officeDocument/2006/relationships" xmlns:p="http://schemas.openxmlformats.org/presentationml/2006/main">
-  <p:cSld>
-    <p:spTree>
-      <p:nvGrpSpPr>
-        <p:cNvPr id="1" name=""/>
-        <p:cNvGrpSpPr/>
-        <p:nvPr/>
-      </p:nvGrpSpPr>
-      <p:grpSpPr>
-        <a:xfrm>
-          <a:off x="0" y="0"/>
-          <a:ext cx="0" cy="0"/>
-          <a:chOff x="0" y="0"/>
-          <a:chExt cx="0" cy="0"/>
-        </a:xfrm>
-      </p:grpSpPr>
-      <p:sp>
-        <p:nvSpPr>
-          <p:cNvPr id="2" name="Título 1"/>
-          <p:cNvSpPr>
-            <a:spLocks noGrp="1"/>
-          </p:cNvSpPr>
-          <p:nvPr>
-            <p:ph type="ctrTitle"/>
-          </p:nvPr>
-        </p:nvSpPr>
-        <p:spPr>
-          <a:xfrm>
-            <a:off x="1524000" y="1722782"/>
-            <a:ext cx="9144000" cy="1005302"/>
-          </a:xfrm>
-        </p:spPr>
-        <p:txBody>
-          <a:bodyPr>
-            <a:normAutofit/>
-          </a:bodyPr>
-          <a:lstStyle/>
-          <a:p>
-            <a:r>
-              <a:rPr lang="pt-BR" dirty="0"/>
-              <a:t>Tecnologias Usadas </a:t>
-            </a:r>
-          </a:p>
-        </p:txBody>
-      </p:sp>
-      <p:sp>
-        <p:nvSpPr>
-          <p:cNvPr id="3" name="Subtítulo 2"/>
-          <p:cNvSpPr>
-            <a:spLocks noGrp="1"/>
-          </p:cNvSpPr>
-          <p:nvPr>
-            <p:ph type="subTitle" idx="1"/>
-          </p:nvPr>
-        </p:nvSpPr>
-        <p:spPr>
-          <a:xfrm>
-            <a:off x="1524000" y="2728084"/>
-            <a:ext cx="9144000" cy="4129916"/>
-          </a:xfrm>
-        </p:spPr>
-        <p:txBody>
-          <a:bodyPr>
-            <a:normAutofit/>
-          </a:bodyPr>
-          <a:lstStyle/>
-          <a:p>
-            <a:pPr marL="342900" indent="-342900">
-              <a:buFont typeface="Arial" panose="020B0604020202020204" pitchFamily="34" charset="0"/>
-              <a:buChar char="•"/>
-            </a:pPr>
-            <a:r>
-              <a:rPr lang="pt-BR" dirty="0"/>
-              <a:t>Aplicativo </a:t>
-            </a:r>
-            <a:r>
-              <a:rPr lang="pt-BR" dirty="0" err="1"/>
-              <a:t>BRModelo</a:t>
-            </a:r>
-            <a:r>
-              <a:rPr lang="pt-BR" dirty="0"/>
-              <a:t>, disponível em &lt;</a:t>
-            </a:r>
-            <a:r>
-              <a:rPr lang="pt-BR" u="sng" dirty="0">
-                <a:hlinkClick r:id="rId2"/>
-              </a:rPr>
-              <a:t>https://sourceforge.net/projects/brmodelo/</a:t>
-            </a:r>
-            <a:r>
-              <a:rPr lang="pt-BR" u="sng" dirty="0"/>
-              <a:t>&gt;</a:t>
-            </a:r>
-          </a:p>
-          <a:p>
-            <a:pPr marL="342900" indent="-342900">
-              <a:buFont typeface="Arial" panose="020B0604020202020204" pitchFamily="34" charset="0"/>
-              <a:buChar char="•"/>
-            </a:pPr>
-            <a:r>
-              <a:rPr lang="pt-BR" dirty="0"/>
-              <a:t>Aplicativo </a:t>
-            </a:r>
-            <a:r>
-              <a:rPr lang="pt-BR" dirty="0" err="1"/>
-              <a:t>Atash</a:t>
-            </a:r>
-            <a:r>
-              <a:rPr lang="pt-BR" dirty="0"/>
-              <a:t>, disponível em </a:t>
-            </a:r>
-            <a:r>
-              <a:rPr lang="pt-BR" u="sng" dirty="0">
-                <a:hlinkClick r:id="rId3"/>
-              </a:rPr>
-              <a:t>https://astah.net/</a:t>
-            </a:r>
-            <a:endParaRPr lang="pt-BR" u="sng" dirty="0"/>
-          </a:p>
-          <a:p>
-            <a:pPr marL="342900" indent="-342900">
-              <a:buFont typeface="Arial" panose="020B0604020202020204" pitchFamily="34" charset="0"/>
-              <a:buChar char="•"/>
-            </a:pPr>
-            <a:r>
-              <a:rPr lang="pt-BR" dirty="0"/>
-              <a:t>Aplicativo IDE </a:t>
-            </a:r>
-            <a:r>
-              <a:rPr lang="pt-BR" dirty="0" err="1"/>
-              <a:t>VSCode</a:t>
-            </a:r>
-            <a:r>
-              <a:rPr lang="pt-BR" dirty="0"/>
-              <a:t>, disponível em &lt;</a:t>
-            </a:r>
-            <a:r>
-              <a:rPr lang="pt-BR" u="sng" dirty="0">
-                <a:hlinkClick r:id="rId4"/>
-              </a:rPr>
-              <a:t>https://code.visualstudio.com/download</a:t>
-            </a:r>
-            <a:r>
-              <a:rPr lang="pt-BR" u="sng" dirty="0"/>
-              <a:t>&gt; </a:t>
-            </a:r>
-          </a:p>
-          <a:p>
-            <a:pPr marL="342900" indent="-342900">
-              <a:buFont typeface="Arial" panose="020B0604020202020204" pitchFamily="34" charset="0"/>
-              <a:buChar char="•"/>
-            </a:pPr>
-            <a:r>
-              <a:rPr lang="pt-BR" dirty="0"/>
-              <a:t>Aplicativo Adobe Illustrator, disponível em: &lt;</a:t>
-            </a:r>
-            <a:r>
-              <a:rPr lang="pt-BR" dirty="0">
-                <a:hlinkClick r:id="rId5"/>
-              </a:rPr>
-              <a:t>https://www.adobe.com/</a:t>
-            </a:r>
-            <a:r>
-              <a:rPr lang="pt-BR" dirty="0" err="1">
-                <a:hlinkClick r:id="rId5"/>
-              </a:rPr>
-              <a:t>br</a:t>
-            </a:r>
-            <a:r>
-              <a:rPr lang="pt-BR" dirty="0">
-                <a:hlinkClick r:id="rId5"/>
-              </a:rPr>
-              <a:t>/</a:t>
-            </a:r>
-            <a:r>
-              <a:rPr lang="pt-BR" dirty="0" err="1">
-                <a:hlinkClick r:id="rId5"/>
-              </a:rPr>
-              <a:t>creativecloud</a:t>
-            </a:r>
-            <a:r>
-              <a:rPr lang="pt-BR" dirty="0">
-                <a:hlinkClick r:id="rId5"/>
-              </a:rPr>
-              <a:t>/plans.html</a:t>
-            </a:r>
-            <a:r>
-              <a:rPr lang="pt-BR" dirty="0"/>
-              <a:t>&gt;  </a:t>
-            </a:r>
-          </a:p>
-          <a:p>
-            <a:pPr marL="342900" indent="-342900">
-              <a:lnSpc>
-                <a:spcPct val="100000"/>
-              </a:lnSpc>
-              <a:buFont typeface="Arial" panose="020B0604020202020204" pitchFamily="34" charset="0"/>
-              <a:buChar char="•"/>
-            </a:pPr>
-            <a:r>
-              <a:rPr lang="pt-BR" dirty="0"/>
-              <a:t>Aplicativo Adobe Photoshop, disponível em: &lt;</a:t>
-            </a:r>
-            <a:r>
-              <a:rPr lang="pt-BR" dirty="0">
-                <a:hlinkClick r:id="rId5"/>
-              </a:rPr>
-              <a:t>https://www.adobe.com/</a:t>
-            </a:r>
-            <a:r>
-              <a:rPr lang="pt-BR" dirty="0" err="1">
-                <a:hlinkClick r:id="rId5"/>
-              </a:rPr>
-              <a:t>br</a:t>
-            </a:r>
-            <a:r>
-              <a:rPr lang="pt-BR" dirty="0">
-                <a:hlinkClick r:id="rId5"/>
-              </a:rPr>
-              <a:t>/</a:t>
-            </a:r>
-            <a:r>
-              <a:rPr lang="pt-BR" dirty="0" err="1">
-                <a:hlinkClick r:id="rId5"/>
-              </a:rPr>
-              <a:t>creativecloud</a:t>
-            </a:r>
-            <a:r>
-              <a:rPr lang="pt-BR" dirty="0">
-                <a:hlinkClick r:id="rId5"/>
-              </a:rPr>
-              <a:t>/plans.html</a:t>
-            </a:r>
-            <a:r>
-              <a:rPr lang="pt-BR" dirty="0"/>
-              <a:t>&gt;</a:t>
-            </a:r>
-          </a:p>
-          <a:p>
-            <a:pPr marL="342900" indent="-342900">
-              <a:buFont typeface="Arial" panose="020B0604020202020204" pitchFamily="34" charset="0"/>
-              <a:buChar char="•"/>
-            </a:pPr>
-            <a:endParaRPr lang="pt-BR" dirty="0"/>
-          </a:p>
-          <a:p>
-            <a:pPr marL="342900" indent="-342900">
-              <a:buFont typeface="Arial" panose="020B0604020202020204" pitchFamily="34" charset="0"/>
-              <a:buChar char="•"/>
-            </a:pPr>
-            <a:endParaRPr lang="pt-BR" dirty="0"/>
-          </a:p>
-          <a:p>
-            <a:pPr marL="342900" indent="-342900">
-              <a:buFont typeface="Arial" panose="020B0604020202020204" pitchFamily="34" charset="0"/>
-              <a:buChar char="•"/>
-            </a:pPr>
-            <a:endParaRPr lang="pt-BR" u="sng" dirty="0"/>
-          </a:p>
-          <a:p>
-            <a:pPr marL="342900" indent="-342900">
-              <a:buFont typeface="Arial" panose="020B0604020202020204" pitchFamily="34" charset="0"/>
-              <a:buChar char="•"/>
-            </a:pPr>
-            <a:endParaRPr lang="pt-BR" u="sng" dirty="0"/>
-          </a:p>
-          <a:p>
-            <a:pPr marL="342900" indent="-342900">
-              <a:buFont typeface="Arial" panose="020B0604020202020204" pitchFamily="34" charset="0"/>
-              <a:buChar char="•"/>
-            </a:pPr>
-            <a:endParaRPr lang="pt-BR" u="sng" dirty="0"/>
-          </a:p>
-          <a:p>
-            <a:pPr marL="342900" indent="-342900">
-              <a:buFont typeface="Arial" panose="020B0604020202020204" pitchFamily="34" charset="0"/>
-              <a:buChar char="•"/>
-            </a:pPr>
-            <a:endParaRPr lang="pt-BR" dirty="0"/>
-          </a:p>
-        </p:txBody>
-      </p:sp>
-      <p:pic>
-        <p:nvPicPr>
-          <p:cNvPr id="4" name="Imagem 3"/>
-          <p:cNvPicPr>
-            <a:picLocks noChangeAspect="1"/>
-          </p:cNvPicPr>
-          <p:nvPr/>
-        </p:nvPicPr>
-        <p:blipFill>
-          <a:blip r:embed="rId6">
-            <a:extLst>
-              <a:ext uri="{28A0092B-C50C-407E-A947-70E740481C1C}">
-                <a14:useLocalDpi xmlns:a14="http://schemas.microsoft.com/office/drawing/2010/main" val="0"/>
-              </a:ext>
-            </a:extLst>
-          </a:blip>
-          <a:stretch>
-            <a:fillRect/>
-          </a:stretch>
-        </p:blipFill>
-        <p:spPr>
-          <a:xfrm>
-            <a:off x="2976127" y="0"/>
-            <a:ext cx="6239746" cy="1381318"/>
-          </a:xfrm>
-          <a:prstGeom prst="rect">
-            <a:avLst/>
-          </a:prstGeom>
-        </p:spPr>
-      </p:pic>
-    </p:spTree>
-    <p:extLst>
-      <p:ext uri="{BB962C8B-B14F-4D97-AF65-F5344CB8AC3E}">
-        <p14:creationId xmlns:p14="http://schemas.microsoft.com/office/powerpoint/2010/main" val="3847982408"/>
+        <p14:creationId xmlns:p14="http://schemas.microsoft.com/office/powerpoint/2010/main" val="297548743"/>
       </p:ext>
     </p:extLst>
   </p:cSld>
@@ -4116,16 +3990,6 @@
               <a:rPr lang="pt-BR" dirty="0"/>
               <a:t>O projeto tem o desenvolvimento de um blog voltado ao automobilismo e motovelocidade.</a:t>
             </a:r>
-          </a:p>
-          <a:p>
-            <a:r>
-              <a:rPr lang="pt-BR" dirty="0"/>
-              <a:t>O desenvolvimento do projeto foi utilizado objetivos claros e requisitos funcionais e não funcionais.</a:t>
-            </a:r>
-          </a:p>
-          <a:p>
-            <a:pPr algn="l"/>
-            <a:endParaRPr lang="pt-BR" dirty="0"/>
           </a:p>
         </p:txBody>
       </p:sp>
@@ -4322,7 +4186,7 @@
             </a:pPr>
             <a:r>
               <a:rPr lang="pt-BR" dirty="0" err="1"/>
-              <a:t>Nacasr</a:t>
+              <a:t>Nascar</a:t>
             </a:r>
             <a:endParaRPr lang="pt-BR" dirty="0"/>
           </a:p>
@@ -4481,7 +4345,7 @@
         </p:spPr>
         <p:txBody>
           <a:bodyPr>
-            <a:normAutofit fontScale="92500" lnSpcReduction="20000"/>
+            <a:normAutofit/>
           </a:bodyPr>
           <a:lstStyle/>
           <a:p>
@@ -4508,26 +4372,6 @@
             <a:r>
               <a:rPr lang="pt-BR" dirty="0"/>
               <a:t>Implementar autenticação de usuários, filtragem de conteúdo e gerenciamento de notícias;</a:t>
-            </a:r>
-          </a:p>
-          <a:p>
-            <a:pPr marL="342900" indent="-342900">
-              <a:buFont typeface="Arial" panose="020B0604020202020204" pitchFamily="34" charset="0"/>
-              <a:buChar char="•"/>
-            </a:pPr>
-            <a:r>
-              <a:rPr lang="pt-BR" dirty="0"/>
-              <a:t>Estruturar categorias relacionadas ao automobilismo para organização das publicações;</a:t>
-            </a:r>
-          </a:p>
-          <a:p>
-            <a:pPr marL="342900" indent="-342900">
-              <a:buFont typeface="Arial" panose="020B0604020202020204" pitchFamily="34" charset="0"/>
-              <a:buChar char="•"/>
-            </a:pPr>
-            <a:r>
-              <a:rPr lang="pt-BR" dirty="0"/>
-              <a:t>Garantir adequada apresentação das informações;</a:t>
             </a:r>
           </a:p>
           <a:p>
@@ -4674,15 +4518,7 @@
           <a:p>
             <a:r>
               <a:rPr lang="pt-BR" dirty="0"/>
-              <a:t>O automobilismo tem apresentado crescimento </a:t>
-            </a:r>
-            <a:r>
-              <a:rPr lang="pt-BR" dirty="0" err="1"/>
-              <a:t>midiatico</a:t>
-            </a:r>
-            <a:r>
-              <a:rPr lang="pt-BR" dirty="0"/>
-              <a:t> nos últimos anos, vem crescendo principalmente pela expansão de cobertura da mídia e pela popularização de conteúdos digitais, agora ainda mais por ter um piloto brasileiro de volta a maior categoria de automobilismo, Gabriel Bortoleto, piloto na Formula 1.</a:t>
+              <a:t>O automobilismo tem apresentado crescimento midiático nos últimos anos, vem crescendo principalmente pela expansão de cobertura da mídia e pela popularização de conteúdos digitais, agora ainda mais por ter um piloto brasileiro de volta a maior categoria de automobilismo, Gabriel Bortoleto, piloto na Formula 1.</a:t>
             </a:r>
           </a:p>
           <a:p>
@@ -4814,7 +4650,7 @@
             </a:pPr>
             <a:r>
               <a:rPr lang="pt-BR" dirty="0"/>
-              <a:t>Sistema seguro de login; </a:t>
+              <a:t>Sistema de login; </a:t>
             </a:r>
           </a:p>
           <a:p>
@@ -5251,8 +5087,8 @@
         </p:blipFill>
         <p:spPr>
           <a:xfrm>
-            <a:off x="2851501" y="29735"/>
-            <a:ext cx="6488995" cy="6874706"/>
+            <a:off x="3066467" y="29735"/>
+            <a:ext cx="6059062" cy="6874706"/>
           </a:xfrm>
           <a:prstGeom prst="rect">
             <a:avLst/>
